--- a/tests/testdata/excel/PowerPoint/空.pptx
+++ b/tests/testdata/excel/PowerPoint/空.pptx
@@ -126,7 +126,7 @@
           <p:cNvPr id="2" name="タイトル 1">
             <a:extLst>
               <a:ext uri="{FF2B5EF4-FFF2-40B4-BE49-F238E27FC236}">
-                <a16:creationId xmlns:a16="http://schemas.microsoft.com/office/drawing/2014/main" id="{67B401D0-0BB9-7C0F-C2B8-813923A7F3FA}"/>
+                <a16:creationId xmlns:a16="http://schemas.microsoft.com/office/drawing/2014/main" id="{823774FA-445A-6E45-20B0-BBAB134CBDF3}"/>
               </a:ext>
             </a:extLst>
           </p:cNvPr>
@@ -163,7 +163,7 @@
           <p:cNvPr id="3" name="字幕 2">
             <a:extLst>
               <a:ext uri="{FF2B5EF4-FFF2-40B4-BE49-F238E27FC236}">
-                <a16:creationId xmlns:a16="http://schemas.microsoft.com/office/drawing/2014/main" id="{5B00CD79-A940-95C6-5DF1-1AEAE9A6A507}"/>
+                <a16:creationId xmlns:a16="http://schemas.microsoft.com/office/drawing/2014/main" id="{E93BCB54-05D3-790F-8D57-F1B992F73DE0}"/>
               </a:ext>
             </a:extLst>
           </p:cNvPr>
@@ -233,7 +233,7 @@
           <p:cNvPr id="4" name="日付プレースホルダー 3">
             <a:extLst>
               <a:ext uri="{FF2B5EF4-FFF2-40B4-BE49-F238E27FC236}">
-                <a16:creationId xmlns:a16="http://schemas.microsoft.com/office/drawing/2014/main" id="{A9AD5A41-6CAB-4717-C104-F201CC0CCAA7}"/>
+                <a16:creationId xmlns:a16="http://schemas.microsoft.com/office/drawing/2014/main" id="{33B647E7-A08D-1851-8A8C-C5C6E3E45C64}"/>
               </a:ext>
             </a:extLst>
           </p:cNvPr>
@@ -249,7 +249,7 @@
           <a:bodyPr/>
           <a:lstStyle/>
           <a:p>
-            <a:fld id="{54A04B92-4CCB-4150-9796-4E1725954593}" type="datetimeFigureOut">
+            <a:fld id="{B9F574A8-C7B1-4E0F-9AF3-9FC6EC549DE5}" type="datetimeFigureOut">
               <a:rPr kumimoji="1" lang="ja-JP" altLang="en-US" smtClean="0"/>
               <a:t>2026/9/20</a:t>
             </a:fld>
@@ -262,7 +262,7 @@
           <p:cNvPr id="5" name="フッター プレースホルダー 4">
             <a:extLst>
               <a:ext uri="{FF2B5EF4-FFF2-40B4-BE49-F238E27FC236}">
-                <a16:creationId xmlns:a16="http://schemas.microsoft.com/office/drawing/2014/main" id="{B1E6920B-8312-D6E9-D1EF-1C4F17B183FF}"/>
+                <a16:creationId xmlns:a16="http://schemas.microsoft.com/office/drawing/2014/main" id="{416D94BC-0C61-686F-DFE5-F76CB42DCD44}"/>
               </a:ext>
             </a:extLst>
           </p:cNvPr>
@@ -287,7 +287,7 @@
           <p:cNvPr id="6" name="スライド番号プレースホルダー 5">
             <a:extLst>
               <a:ext uri="{FF2B5EF4-FFF2-40B4-BE49-F238E27FC236}">
-                <a16:creationId xmlns:a16="http://schemas.microsoft.com/office/drawing/2014/main" id="{9DF9B9DD-CAC7-06A3-3B61-43D2A014845B}"/>
+                <a16:creationId xmlns:a16="http://schemas.microsoft.com/office/drawing/2014/main" id="{B9B7A96B-95CD-A4FF-3019-2B9B0802EE8B}"/>
               </a:ext>
             </a:extLst>
           </p:cNvPr>
@@ -303,7 +303,7 @@
           <a:bodyPr/>
           <a:lstStyle/>
           <a:p>
-            <a:fld id="{851177F4-E301-4E1D-B2F0-E53DBA27D99A}" type="slidenum">
+            <a:fld id="{883F13B9-9467-4046-BF92-7C11D9711524}" type="slidenum">
               <a:rPr kumimoji="1" lang="ja-JP" altLang="en-US" smtClean="0"/>
               <a:t>‹#›</a:t>
             </a:fld>
@@ -314,7 +314,7 @@
     </p:spTree>
     <p:extLst>
       <p:ext uri="{BB962C8B-B14F-4D97-AF65-F5344CB8AC3E}">
-        <p14:creationId xmlns:p14="http://schemas.microsoft.com/office/powerpoint/2010/main" val="2196109029"/>
+        <p14:creationId xmlns:p14="http://schemas.microsoft.com/office/powerpoint/2010/main" val="2557328694"/>
       </p:ext>
     </p:extLst>
   </p:cSld>
@@ -346,7 +346,7 @@
           <p:cNvPr id="2" name="タイトル 1">
             <a:extLst>
               <a:ext uri="{FF2B5EF4-FFF2-40B4-BE49-F238E27FC236}">
-                <a16:creationId xmlns:a16="http://schemas.microsoft.com/office/drawing/2014/main" id="{D2F79C82-B590-A094-FA83-F2A798695041}"/>
+                <a16:creationId xmlns:a16="http://schemas.microsoft.com/office/drawing/2014/main" id="{57F01BBB-2606-DAD2-0E83-60EE6399437F}"/>
               </a:ext>
             </a:extLst>
           </p:cNvPr>
@@ -374,7 +374,7 @@
           <p:cNvPr id="3" name="縦書きテキスト プレースホルダー 2">
             <a:extLst>
               <a:ext uri="{FF2B5EF4-FFF2-40B4-BE49-F238E27FC236}">
-                <a16:creationId xmlns:a16="http://schemas.microsoft.com/office/drawing/2014/main" id="{3857C5E4-2F97-EAB5-9013-A89BD14CE725}"/>
+                <a16:creationId xmlns:a16="http://schemas.microsoft.com/office/drawing/2014/main" id="{4B54DD0F-CAAD-F10C-F970-2C070B00F924}"/>
               </a:ext>
             </a:extLst>
           </p:cNvPr>
@@ -463,7 +463,7 @@
           <p:cNvPr id="4" name="日付プレースホルダー 3">
             <a:extLst>
               <a:ext uri="{FF2B5EF4-FFF2-40B4-BE49-F238E27FC236}">
-                <a16:creationId xmlns:a16="http://schemas.microsoft.com/office/drawing/2014/main" id="{E43B2354-DE20-B20A-8657-1350F341BCCF}"/>
+                <a16:creationId xmlns:a16="http://schemas.microsoft.com/office/drawing/2014/main" id="{5E0FFC09-1459-CB96-CFE8-BE8977DE8B24}"/>
               </a:ext>
             </a:extLst>
           </p:cNvPr>
@@ -479,7 +479,7 @@
           <a:bodyPr/>
           <a:lstStyle/>
           <a:p>
-            <a:fld id="{54A04B92-4CCB-4150-9796-4E1725954593}" type="datetimeFigureOut">
+            <a:fld id="{B9F574A8-C7B1-4E0F-9AF3-9FC6EC549DE5}" type="datetimeFigureOut">
               <a:rPr kumimoji="1" lang="ja-JP" altLang="en-US" smtClean="0"/>
               <a:t>2026/9/20</a:t>
             </a:fld>
@@ -492,7 +492,7 @@
           <p:cNvPr id="5" name="フッター プレースホルダー 4">
             <a:extLst>
               <a:ext uri="{FF2B5EF4-FFF2-40B4-BE49-F238E27FC236}">
-                <a16:creationId xmlns:a16="http://schemas.microsoft.com/office/drawing/2014/main" id="{4E562F05-BEA6-6846-9B30-E25F4A8AE59C}"/>
+                <a16:creationId xmlns:a16="http://schemas.microsoft.com/office/drawing/2014/main" id="{461BB310-5821-E8ED-1291-FD255728D375}"/>
               </a:ext>
             </a:extLst>
           </p:cNvPr>
@@ -517,7 +517,7 @@
           <p:cNvPr id="6" name="スライド番号プレースホルダー 5">
             <a:extLst>
               <a:ext uri="{FF2B5EF4-FFF2-40B4-BE49-F238E27FC236}">
-                <a16:creationId xmlns:a16="http://schemas.microsoft.com/office/drawing/2014/main" id="{AD5676E9-B1F1-1720-9F8D-87961F9FC902}"/>
+                <a16:creationId xmlns:a16="http://schemas.microsoft.com/office/drawing/2014/main" id="{1B6663D9-B7EB-7FF9-8DBD-9CB64B4A723E}"/>
               </a:ext>
             </a:extLst>
           </p:cNvPr>
@@ -533,7 +533,7 @@
           <a:bodyPr/>
           <a:lstStyle/>
           <a:p>
-            <a:fld id="{851177F4-E301-4E1D-B2F0-E53DBA27D99A}" type="slidenum">
+            <a:fld id="{883F13B9-9467-4046-BF92-7C11D9711524}" type="slidenum">
               <a:rPr kumimoji="1" lang="ja-JP" altLang="en-US" smtClean="0"/>
               <a:t>‹#›</a:t>
             </a:fld>
@@ -544,7 +544,7 @@
     </p:spTree>
     <p:extLst>
       <p:ext uri="{BB962C8B-B14F-4D97-AF65-F5344CB8AC3E}">
-        <p14:creationId xmlns:p14="http://schemas.microsoft.com/office/powerpoint/2010/main" val="495321320"/>
+        <p14:creationId xmlns:p14="http://schemas.microsoft.com/office/powerpoint/2010/main" val="1374876884"/>
       </p:ext>
     </p:extLst>
   </p:cSld>
@@ -576,7 +576,7 @@
           <p:cNvPr id="2" name="縦書きタイトル 1">
             <a:extLst>
               <a:ext uri="{FF2B5EF4-FFF2-40B4-BE49-F238E27FC236}">
-                <a16:creationId xmlns:a16="http://schemas.microsoft.com/office/drawing/2014/main" id="{0B48D47A-2324-A54A-66EE-F30E237A4F0B}"/>
+                <a16:creationId xmlns:a16="http://schemas.microsoft.com/office/drawing/2014/main" id="{AF8E4EC8-77F8-1204-5160-D7D2862C451A}"/>
               </a:ext>
             </a:extLst>
           </p:cNvPr>
@@ -609,7 +609,7 @@
           <p:cNvPr id="3" name="縦書きテキスト プレースホルダー 2">
             <a:extLst>
               <a:ext uri="{FF2B5EF4-FFF2-40B4-BE49-F238E27FC236}">
-                <a16:creationId xmlns:a16="http://schemas.microsoft.com/office/drawing/2014/main" id="{93C38077-1D93-1094-5855-3FFFCE2F039E}"/>
+                <a16:creationId xmlns:a16="http://schemas.microsoft.com/office/drawing/2014/main" id="{7766DBF5-0CC3-9353-AFD3-3D9C138438B3}"/>
               </a:ext>
             </a:extLst>
           </p:cNvPr>
@@ -703,7 +703,7 @@
           <p:cNvPr id="4" name="日付プレースホルダー 3">
             <a:extLst>
               <a:ext uri="{FF2B5EF4-FFF2-40B4-BE49-F238E27FC236}">
-                <a16:creationId xmlns:a16="http://schemas.microsoft.com/office/drawing/2014/main" id="{D4AF1342-8630-6ED7-E615-3739E516CE17}"/>
+                <a16:creationId xmlns:a16="http://schemas.microsoft.com/office/drawing/2014/main" id="{85E0D530-09C1-06C0-4C43-3D06BB4B90D3}"/>
               </a:ext>
             </a:extLst>
           </p:cNvPr>
@@ -719,7 +719,7 @@
           <a:bodyPr/>
           <a:lstStyle/>
           <a:p>
-            <a:fld id="{54A04B92-4CCB-4150-9796-4E1725954593}" type="datetimeFigureOut">
+            <a:fld id="{B9F574A8-C7B1-4E0F-9AF3-9FC6EC549DE5}" type="datetimeFigureOut">
               <a:rPr kumimoji="1" lang="ja-JP" altLang="en-US" smtClean="0"/>
               <a:t>2026/9/20</a:t>
             </a:fld>
@@ -732,7 +732,7 @@
           <p:cNvPr id="5" name="フッター プレースホルダー 4">
             <a:extLst>
               <a:ext uri="{FF2B5EF4-FFF2-40B4-BE49-F238E27FC236}">
-                <a16:creationId xmlns:a16="http://schemas.microsoft.com/office/drawing/2014/main" id="{DD7A53AA-C35F-D653-19CB-CBEFF3A0FB6B}"/>
+                <a16:creationId xmlns:a16="http://schemas.microsoft.com/office/drawing/2014/main" id="{7B5A6C6B-98C1-2413-2D6B-C44E6575D624}"/>
               </a:ext>
             </a:extLst>
           </p:cNvPr>
@@ -757,7 +757,7 @@
           <p:cNvPr id="6" name="スライド番号プレースホルダー 5">
             <a:extLst>
               <a:ext uri="{FF2B5EF4-FFF2-40B4-BE49-F238E27FC236}">
-                <a16:creationId xmlns:a16="http://schemas.microsoft.com/office/drawing/2014/main" id="{2279EECF-A7B8-9888-93BA-BA81646C63D1}"/>
+                <a16:creationId xmlns:a16="http://schemas.microsoft.com/office/drawing/2014/main" id="{5F8AF7FA-A8B4-B803-CE69-94193D5B35EA}"/>
               </a:ext>
             </a:extLst>
           </p:cNvPr>
@@ -773,7 +773,7 @@
           <a:bodyPr/>
           <a:lstStyle/>
           <a:p>
-            <a:fld id="{851177F4-E301-4E1D-B2F0-E53DBA27D99A}" type="slidenum">
+            <a:fld id="{883F13B9-9467-4046-BF92-7C11D9711524}" type="slidenum">
               <a:rPr kumimoji="1" lang="ja-JP" altLang="en-US" smtClean="0"/>
               <a:t>‹#›</a:t>
             </a:fld>
@@ -784,7 +784,7 @@
     </p:spTree>
     <p:extLst>
       <p:ext uri="{BB962C8B-B14F-4D97-AF65-F5344CB8AC3E}">
-        <p14:creationId xmlns:p14="http://schemas.microsoft.com/office/powerpoint/2010/main" val="1355281337"/>
+        <p14:creationId xmlns:p14="http://schemas.microsoft.com/office/powerpoint/2010/main" val="3131213936"/>
       </p:ext>
     </p:extLst>
   </p:cSld>
@@ -816,7 +816,7 @@
           <p:cNvPr id="2" name="タイトル 1">
             <a:extLst>
               <a:ext uri="{FF2B5EF4-FFF2-40B4-BE49-F238E27FC236}">
-                <a16:creationId xmlns:a16="http://schemas.microsoft.com/office/drawing/2014/main" id="{48368D05-D094-10C4-6CA4-0793FAE9FA22}"/>
+                <a16:creationId xmlns:a16="http://schemas.microsoft.com/office/drawing/2014/main" id="{AA5F8F90-9C49-5953-9DA4-A76FDC7C1478}"/>
               </a:ext>
             </a:extLst>
           </p:cNvPr>
@@ -844,7 +844,7 @@
           <p:cNvPr id="3" name="コンテンツ プレースホルダー 2">
             <a:extLst>
               <a:ext uri="{FF2B5EF4-FFF2-40B4-BE49-F238E27FC236}">
-                <a16:creationId xmlns:a16="http://schemas.microsoft.com/office/drawing/2014/main" id="{981AEF32-083D-6B4E-BC6C-1EAFE8ACE9DE}"/>
+                <a16:creationId xmlns:a16="http://schemas.microsoft.com/office/drawing/2014/main" id="{2D9F0BCF-7EBE-F781-6B9E-6EADD1452E96}"/>
               </a:ext>
             </a:extLst>
           </p:cNvPr>
@@ -933,7 +933,7 @@
           <p:cNvPr id="4" name="日付プレースホルダー 3">
             <a:extLst>
               <a:ext uri="{FF2B5EF4-FFF2-40B4-BE49-F238E27FC236}">
-                <a16:creationId xmlns:a16="http://schemas.microsoft.com/office/drawing/2014/main" id="{5018E8CC-0CC5-6620-B0D7-7F1F1BBA8EA9}"/>
+                <a16:creationId xmlns:a16="http://schemas.microsoft.com/office/drawing/2014/main" id="{6C81B901-4797-577B-56F8-9A4AAC4CB4CA}"/>
               </a:ext>
             </a:extLst>
           </p:cNvPr>
@@ -949,7 +949,7 @@
           <a:bodyPr/>
           <a:lstStyle/>
           <a:p>
-            <a:fld id="{54A04B92-4CCB-4150-9796-4E1725954593}" type="datetimeFigureOut">
+            <a:fld id="{B9F574A8-C7B1-4E0F-9AF3-9FC6EC549DE5}" type="datetimeFigureOut">
               <a:rPr kumimoji="1" lang="ja-JP" altLang="en-US" smtClean="0"/>
               <a:t>2026/9/20</a:t>
             </a:fld>
@@ -962,7 +962,7 @@
           <p:cNvPr id="5" name="フッター プレースホルダー 4">
             <a:extLst>
               <a:ext uri="{FF2B5EF4-FFF2-40B4-BE49-F238E27FC236}">
-                <a16:creationId xmlns:a16="http://schemas.microsoft.com/office/drawing/2014/main" id="{57E2949F-096A-AD8A-0775-5225E455117B}"/>
+                <a16:creationId xmlns:a16="http://schemas.microsoft.com/office/drawing/2014/main" id="{AFC470AD-E908-A43D-896D-768B31E35692}"/>
               </a:ext>
             </a:extLst>
           </p:cNvPr>
@@ -987,7 +987,7 @@
           <p:cNvPr id="6" name="スライド番号プレースホルダー 5">
             <a:extLst>
               <a:ext uri="{FF2B5EF4-FFF2-40B4-BE49-F238E27FC236}">
-                <a16:creationId xmlns:a16="http://schemas.microsoft.com/office/drawing/2014/main" id="{067F2631-D1D1-0A5C-9963-42AAE58FE24D}"/>
+                <a16:creationId xmlns:a16="http://schemas.microsoft.com/office/drawing/2014/main" id="{1F6AD602-EC0A-DA60-36C7-4A95AB6A32D8}"/>
               </a:ext>
             </a:extLst>
           </p:cNvPr>
@@ -1003,7 +1003,7 @@
           <a:bodyPr/>
           <a:lstStyle/>
           <a:p>
-            <a:fld id="{851177F4-E301-4E1D-B2F0-E53DBA27D99A}" type="slidenum">
+            <a:fld id="{883F13B9-9467-4046-BF92-7C11D9711524}" type="slidenum">
               <a:rPr kumimoji="1" lang="ja-JP" altLang="en-US" smtClean="0"/>
               <a:t>‹#›</a:t>
             </a:fld>
@@ -1014,7 +1014,7 @@
     </p:spTree>
     <p:extLst>
       <p:ext uri="{BB962C8B-B14F-4D97-AF65-F5344CB8AC3E}">
-        <p14:creationId xmlns:p14="http://schemas.microsoft.com/office/powerpoint/2010/main" val="3839788059"/>
+        <p14:creationId xmlns:p14="http://schemas.microsoft.com/office/powerpoint/2010/main" val="3576345726"/>
       </p:ext>
     </p:extLst>
   </p:cSld>
@@ -1046,7 +1046,7 @@
           <p:cNvPr id="2" name="タイトル 1">
             <a:extLst>
               <a:ext uri="{FF2B5EF4-FFF2-40B4-BE49-F238E27FC236}">
-                <a16:creationId xmlns:a16="http://schemas.microsoft.com/office/drawing/2014/main" id="{8623B1CA-7A3D-3893-415A-AA856138FCF2}"/>
+                <a16:creationId xmlns:a16="http://schemas.microsoft.com/office/drawing/2014/main" id="{DD81D607-4AEA-43F4-9E22-C0113F731DBA}"/>
               </a:ext>
             </a:extLst>
           </p:cNvPr>
@@ -1083,7 +1083,7 @@
           <p:cNvPr id="3" name="テキスト プレースホルダー 2">
             <a:extLst>
               <a:ext uri="{FF2B5EF4-FFF2-40B4-BE49-F238E27FC236}">
-                <a16:creationId xmlns:a16="http://schemas.microsoft.com/office/drawing/2014/main" id="{108957D1-95B9-F8C9-0682-E44DD59C03E1}"/>
+                <a16:creationId xmlns:a16="http://schemas.microsoft.com/office/drawing/2014/main" id="{F5FBC51D-3A24-6605-8711-0F278E84F422}"/>
               </a:ext>
             </a:extLst>
           </p:cNvPr>
@@ -1208,7 +1208,7 @@
           <p:cNvPr id="4" name="日付プレースホルダー 3">
             <a:extLst>
               <a:ext uri="{FF2B5EF4-FFF2-40B4-BE49-F238E27FC236}">
-                <a16:creationId xmlns:a16="http://schemas.microsoft.com/office/drawing/2014/main" id="{541835B8-D21F-654A-C6B7-187971CE1874}"/>
+                <a16:creationId xmlns:a16="http://schemas.microsoft.com/office/drawing/2014/main" id="{B6BEF3E4-5B46-CF23-443F-E84FD0256090}"/>
               </a:ext>
             </a:extLst>
           </p:cNvPr>
@@ -1224,7 +1224,7 @@
           <a:bodyPr/>
           <a:lstStyle/>
           <a:p>
-            <a:fld id="{54A04B92-4CCB-4150-9796-4E1725954593}" type="datetimeFigureOut">
+            <a:fld id="{B9F574A8-C7B1-4E0F-9AF3-9FC6EC549DE5}" type="datetimeFigureOut">
               <a:rPr kumimoji="1" lang="ja-JP" altLang="en-US" smtClean="0"/>
               <a:t>2026/9/20</a:t>
             </a:fld>
@@ -1237,7 +1237,7 @@
           <p:cNvPr id="5" name="フッター プレースホルダー 4">
             <a:extLst>
               <a:ext uri="{FF2B5EF4-FFF2-40B4-BE49-F238E27FC236}">
-                <a16:creationId xmlns:a16="http://schemas.microsoft.com/office/drawing/2014/main" id="{87B4CA19-38F2-D23E-6959-1F983F85C98B}"/>
+                <a16:creationId xmlns:a16="http://schemas.microsoft.com/office/drawing/2014/main" id="{F70F52A9-A167-FD66-A422-FBC611DC3417}"/>
               </a:ext>
             </a:extLst>
           </p:cNvPr>
@@ -1262,7 +1262,7 @@
           <p:cNvPr id="6" name="スライド番号プレースホルダー 5">
             <a:extLst>
               <a:ext uri="{FF2B5EF4-FFF2-40B4-BE49-F238E27FC236}">
-                <a16:creationId xmlns:a16="http://schemas.microsoft.com/office/drawing/2014/main" id="{FEB2ACD1-A476-F222-ACF9-3383E553EBA3}"/>
+                <a16:creationId xmlns:a16="http://schemas.microsoft.com/office/drawing/2014/main" id="{5C685C7E-73CB-263B-F3C3-3E0197E38ED4}"/>
               </a:ext>
             </a:extLst>
           </p:cNvPr>
@@ -1278,7 +1278,7 @@
           <a:bodyPr/>
           <a:lstStyle/>
           <a:p>
-            <a:fld id="{851177F4-E301-4E1D-B2F0-E53DBA27D99A}" type="slidenum">
+            <a:fld id="{883F13B9-9467-4046-BF92-7C11D9711524}" type="slidenum">
               <a:rPr kumimoji="1" lang="ja-JP" altLang="en-US" smtClean="0"/>
               <a:t>‹#›</a:t>
             </a:fld>
@@ -1289,7 +1289,7 @@
     </p:spTree>
     <p:extLst>
       <p:ext uri="{BB962C8B-B14F-4D97-AF65-F5344CB8AC3E}">
-        <p14:creationId xmlns:p14="http://schemas.microsoft.com/office/powerpoint/2010/main" val="203117532"/>
+        <p14:creationId xmlns:p14="http://schemas.microsoft.com/office/powerpoint/2010/main" val="2072461122"/>
       </p:ext>
     </p:extLst>
   </p:cSld>
@@ -1321,7 +1321,7 @@
           <p:cNvPr id="2" name="タイトル 1">
             <a:extLst>
               <a:ext uri="{FF2B5EF4-FFF2-40B4-BE49-F238E27FC236}">
-                <a16:creationId xmlns:a16="http://schemas.microsoft.com/office/drawing/2014/main" id="{F0BF8DBF-812B-CD0A-9BEC-0E4B5755AF9E}"/>
+                <a16:creationId xmlns:a16="http://schemas.microsoft.com/office/drawing/2014/main" id="{6187EA37-E70E-E51D-BF46-E6CD7E6246DB}"/>
               </a:ext>
             </a:extLst>
           </p:cNvPr>
@@ -1349,7 +1349,7 @@
           <p:cNvPr id="3" name="コンテンツ プレースホルダー 2">
             <a:extLst>
               <a:ext uri="{FF2B5EF4-FFF2-40B4-BE49-F238E27FC236}">
-                <a16:creationId xmlns:a16="http://schemas.microsoft.com/office/drawing/2014/main" id="{80189F68-14CC-9E6B-7C42-AEB9DAB8585E}"/>
+                <a16:creationId xmlns:a16="http://schemas.microsoft.com/office/drawing/2014/main" id="{F8EA6715-4FBB-0B4B-6692-02F805A2404E}"/>
               </a:ext>
             </a:extLst>
           </p:cNvPr>
@@ -1443,7 +1443,7 @@
           <p:cNvPr id="4" name="コンテンツ プレースホルダー 3">
             <a:extLst>
               <a:ext uri="{FF2B5EF4-FFF2-40B4-BE49-F238E27FC236}">
-                <a16:creationId xmlns:a16="http://schemas.microsoft.com/office/drawing/2014/main" id="{3D06FA9F-8DBF-07BE-A91D-608077A37FFB}"/>
+                <a16:creationId xmlns:a16="http://schemas.microsoft.com/office/drawing/2014/main" id="{D36E0BD4-E414-35CB-21B8-5AAFF0902B0B}"/>
               </a:ext>
             </a:extLst>
           </p:cNvPr>
@@ -1537,7 +1537,7 @@
           <p:cNvPr id="5" name="日付プレースホルダー 4">
             <a:extLst>
               <a:ext uri="{FF2B5EF4-FFF2-40B4-BE49-F238E27FC236}">
-                <a16:creationId xmlns:a16="http://schemas.microsoft.com/office/drawing/2014/main" id="{DA9B8269-5D8F-D688-7D48-6EFE19C2E7CC}"/>
+                <a16:creationId xmlns:a16="http://schemas.microsoft.com/office/drawing/2014/main" id="{ACFBBC2E-A3C4-F85C-F117-6B90D3870797}"/>
               </a:ext>
             </a:extLst>
           </p:cNvPr>
@@ -1553,7 +1553,7 @@
           <a:bodyPr/>
           <a:lstStyle/>
           <a:p>
-            <a:fld id="{54A04B92-4CCB-4150-9796-4E1725954593}" type="datetimeFigureOut">
+            <a:fld id="{B9F574A8-C7B1-4E0F-9AF3-9FC6EC549DE5}" type="datetimeFigureOut">
               <a:rPr kumimoji="1" lang="ja-JP" altLang="en-US" smtClean="0"/>
               <a:t>2026/9/20</a:t>
             </a:fld>
@@ -1566,7 +1566,7 @@
           <p:cNvPr id="6" name="フッター プレースホルダー 5">
             <a:extLst>
               <a:ext uri="{FF2B5EF4-FFF2-40B4-BE49-F238E27FC236}">
-                <a16:creationId xmlns:a16="http://schemas.microsoft.com/office/drawing/2014/main" id="{03BDEB27-6EE4-58BB-83F8-B0DC71A4DB56}"/>
+                <a16:creationId xmlns:a16="http://schemas.microsoft.com/office/drawing/2014/main" id="{533AD8C5-1188-D275-B91D-34DDB8549D84}"/>
               </a:ext>
             </a:extLst>
           </p:cNvPr>
@@ -1591,7 +1591,7 @@
           <p:cNvPr id="7" name="スライド番号プレースホルダー 6">
             <a:extLst>
               <a:ext uri="{FF2B5EF4-FFF2-40B4-BE49-F238E27FC236}">
-                <a16:creationId xmlns:a16="http://schemas.microsoft.com/office/drawing/2014/main" id="{23EFD488-B19A-00B2-77CC-1AD437D97667}"/>
+                <a16:creationId xmlns:a16="http://schemas.microsoft.com/office/drawing/2014/main" id="{67013C30-281D-E6FD-64F6-F4D4D83CD5B0}"/>
               </a:ext>
             </a:extLst>
           </p:cNvPr>
@@ -1607,7 +1607,7 @@
           <a:bodyPr/>
           <a:lstStyle/>
           <a:p>
-            <a:fld id="{851177F4-E301-4E1D-B2F0-E53DBA27D99A}" type="slidenum">
+            <a:fld id="{883F13B9-9467-4046-BF92-7C11D9711524}" type="slidenum">
               <a:rPr kumimoji="1" lang="ja-JP" altLang="en-US" smtClean="0"/>
               <a:t>‹#›</a:t>
             </a:fld>
@@ -1618,7 +1618,7 @@
     </p:spTree>
     <p:extLst>
       <p:ext uri="{BB962C8B-B14F-4D97-AF65-F5344CB8AC3E}">
-        <p14:creationId xmlns:p14="http://schemas.microsoft.com/office/powerpoint/2010/main" val="1193883720"/>
+        <p14:creationId xmlns:p14="http://schemas.microsoft.com/office/powerpoint/2010/main" val="1255760317"/>
       </p:ext>
     </p:extLst>
   </p:cSld>
@@ -1650,7 +1650,7 @@
           <p:cNvPr id="2" name="タイトル 1">
             <a:extLst>
               <a:ext uri="{FF2B5EF4-FFF2-40B4-BE49-F238E27FC236}">
-                <a16:creationId xmlns:a16="http://schemas.microsoft.com/office/drawing/2014/main" id="{78BD2C02-65E7-7015-F0CF-741F8C082306}"/>
+                <a16:creationId xmlns:a16="http://schemas.microsoft.com/office/drawing/2014/main" id="{65ADF3AD-55D2-744E-1083-78410B545B84}"/>
               </a:ext>
             </a:extLst>
           </p:cNvPr>
@@ -1683,7 +1683,7 @@
           <p:cNvPr id="3" name="テキスト プレースホルダー 2">
             <a:extLst>
               <a:ext uri="{FF2B5EF4-FFF2-40B4-BE49-F238E27FC236}">
-                <a16:creationId xmlns:a16="http://schemas.microsoft.com/office/drawing/2014/main" id="{3BA12911-239E-1124-DF3B-B801B5B492AF}"/>
+                <a16:creationId xmlns:a16="http://schemas.microsoft.com/office/drawing/2014/main" id="{21830C7C-60A3-5E87-94E8-2BA288705E64}"/>
               </a:ext>
             </a:extLst>
           </p:cNvPr>
@@ -1754,7 +1754,7 @@
           <p:cNvPr id="4" name="コンテンツ プレースホルダー 3">
             <a:extLst>
               <a:ext uri="{FF2B5EF4-FFF2-40B4-BE49-F238E27FC236}">
-                <a16:creationId xmlns:a16="http://schemas.microsoft.com/office/drawing/2014/main" id="{70CDC8DF-56F5-482B-C7A5-5CBB835C7007}"/>
+                <a16:creationId xmlns:a16="http://schemas.microsoft.com/office/drawing/2014/main" id="{272D54D0-3C52-8FAD-E02D-9499F7CD93D9}"/>
               </a:ext>
             </a:extLst>
           </p:cNvPr>
@@ -1848,7 +1848,7 @@
           <p:cNvPr id="5" name="テキスト プレースホルダー 4">
             <a:extLst>
               <a:ext uri="{FF2B5EF4-FFF2-40B4-BE49-F238E27FC236}">
-                <a16:creationId xmlns:a16="http://schemas.microsoft.com/office/drawing/2014/main" id="{7CAD5078-1F9A-028D-E83D-8E5621C7AD93}"/>
+                <a16:creationId xmlns:a16="http://schemas.microsoft.com/office/drawing/2014/main" id="{2059CCBA-9E7C-E1CD-1671-B780FEE6F119}"/>
               </a:ext>
             </a:extLst>
           </p:cNvPr>
@@ -1919,7 +1919,7 @@
           <p:cNvPr id="6" name="コンテンツ プレースホルダー 5">
             <a:extLst>
               <a:ext uri="{FF2B5EF4-FFF2-40B4-BE49-F238E27FC236}">
-                <a16:creationId xmlns:a16="http://schemas.microsoft.com/office/drawing/2014/main" id="{2381F910-1965-321D-3EC7-A057B2EAC05F}"/>
+                <a16:creationId xmlns:a16="http://schemas.microsoft.com/office/drawing/2014/main" id="{836F9B67-AA86-19E3-20EA-2F548BE52B3D}"/>
               </a:ext>
             </a:extLst>
           </p:cNvPr>
@@ -2013,7 +2013,7 @@
           <p:cNvPr id="7" name="日付プレースホルダー 6">
             <a:extLst>
               <a:ext uri="{FF2B5EF4-FFF2-40B4-BE49-F238E27FC236}">
-                <a16:creationId xmlns:a16="http://schemas.microsoft.com/office/drawing/2014/main" id="{B62A31F0-65ED-A545-391D-D572D99EDF45}"/>
+                <a16:creationId xmlns:a16="http://schemas.microsoft.com/office/drawing/2014/main" id="{A059F084-AC41-A13B-3CF7-449E661D4968}"/>
               </a:ext>
             </a:extLst>
           </p:cNvPr>
@@ -2029,7 +2029,7 @@
           <a:bodyPr/>
           <a:lstStyle/>
           <a:p>
-            <a:fld id="{54A04B92-4CCB-4150-9796-4E1725954593}" type="datetimeFigureOut">
+            <a:fld id="{B9F574A8-C7B1-4E0F-9AF3-9FC6EC549DE5}" type="datetimeFigureOut">
               <a:rPr kumimoji="1" lang="ja-JP" altLang="en-US" smtClean="0"/>
               <a:t>2026/9/20</a:t>
             </a:fld>
@@ -2042,7 +2042,7 @@
           <p:cNvPr id="8" name="フッター プレースホルダー 7">
             <a:extLst>
               <a:ext uri="{FF2B5EF4-FFF2-40B4-BE49-F238E27FC236}">
-                <a16:creationId xmlns:a16="http://schemas.microsoft.com/office/drawing/2014/main" id="{601CB304-A96C-58AC-8332-CA6713A5AA76}"/>
+                <a16:creationId xmlns:a16="http://schemas.microsoft.com/office/drawing/2014/main" id="{5D37F15F-6EFE-B469-BF06-EC07E50D5A18}"/>
               </a:ext>
             </a:extLst>
           </p:cNvPr>
@@ -2067,7 +2067,7 @@
           <p:cNvPr id="9" name="スライド番号プレースホルダー 8">
             <a:extLst>
               <a:ext uri="{FF2B5EF4-FFF2-40B4-BE49-F238E27FC236}">
-                <a16:creationId xmlns:a16="http://schemas.microsoft.com/office/drawing/2014/main" id="{69EC498C-0F65-4F82-D171-51259BFC57BB}"/>
+                <a16:creationId xmlns:a16="http://schemas.microsoft.com/office/drawing/2014/main" id="{2D047ADF-7FAC-600E-236C-3B44DB401C33}"/>
               </a:ext>
             </a:extLst>
           </p:cNvPr>
@@ -2083,7 +2083,7 @@
           <a:bodyPr/>
           <a:lstStyle/>
           <a:p>
-            <a:fld id="{851177F4-E301-4E1D-B2F0-E53DBA27D99A}" type="slidenum">
+            <a:fld id="{883F13B9-9467-4046-BF92-7C11D9711524}" type="slidenum">
               <a:rPr kumimoji="1" lang="ja-JP" altLang="en-US" smtClean="0"/>
               <a:t>‹#›</a:t>
             </a:fld>
@@ -2094,7 +2094,7 @@
     </p:spTree>
     <p:extLst>
       <p:ext uri="{BB962C8B-B14F-4D97-AF65-F5344CB8AC3E}">
-        <p14:creationId xmlns:p14="http://schemas.microsoft.com/office/powerpoint/2010/main" val="2529183953"/>
+        <p14:creationId xmlns:p14="http://schemas.microsoft.com/office/powerpoint/2010/main" val="3543422113"/>
       </p:ext>
     </p:extLst>
   </p:cSld>
@@ -2126,7 +2126,7 @@
           <p:cNvPr id="2" name="タイトル 1">
             <a:extLst>
               <a:ext uri="{FF2B5EF4-FFF2-40B4-BE49-F238E27FC236}">
-                <a16:creationId xmlns:a16="http://schemas.microsoft.com/office/drawing/2014/main" id="{BEF8EAFB-7034-FE42-BE3F-2340823CF667}"/>
+                <a16:creationId xmlns:a16="http://schemas.microsoft.com/office/drawing/2014/main" id="{ABCB3C76-F5F1-6CBF-3049-D2A12B1A862F}"/>
               </a:ext>
             </a:extLst>
           </p:cNvPr>
@@ -2154,7 +2154,7 @@
           <p:cNvPr id="3" name="日付プレースホルダー 2">
             <a:extLst>
               <a:ext uri="{FF2B5EF4-FFF2-40B4-BE49-F238E27FC236}">
-                <a16:creationId xmlns:a16="http://schemas.microsoft.com/office/drawing/2014/main" id="{8019D66F-7088-8FE8-4A71-130BF37DAA5F}"/>
+                <a16:creationId xmlns:a16="http://schemas.microsoft.com/office/drawing/2014/main" id="{D43E1A84-85AC-5F13-73F9-BB22485391B8}"/>
               </a:ext>
             </a:extLst>
           </p:cNvPr>
@@ -2170,7 +2170,7 @@
           <a:bodyPr/>
           <a:lstStyle/>
           <a:p>
-            <a:fld id="{54A04B92-4CCB-4150-9796-4E1725954593}" type="datetimeFigureOut">
+            <a:fld id="{B9F574A8-C7B1-4E0F-9AF3-9FC6EC549DE5}" type="datetimeFigureOut">
               <a:rPr kumimoji="1" lang="ja-JP" altLang="en-US" smtClean="0"/>
               <a:t>2026/9/20</a:t>
             </a:fld>
@@ -2183,7 +2183,7 @@
           <p:cNvPr id="4" name="フッター プレースホルダー 3">
             <a:extLst>
               <a:ext uri="{FF2B5EF4-FFF2-40B4-BE49-F238E27FC236}">
-                <a16:creationId xmlns:a16="http://schemas.microsoft.com/office/drawing/2014/main" id="{849879BC-B44E-F11A-755B-8556BA1077F9}"/>
+                <a16:creationId xmlns:a16="http://schemas.microsoft.com/office/drawing/2014/main" id="{BD36A6D1-75E5-A323-A46D-7986729E8E25}"/>
               </a:ext>
             </a:extLst>
           </p:cNvPr>
@@ -2208,7 +2208,7 @@
           <p:cNvPr id="5" name="スライド番号プレースホルダー 4">
             <a:extLst>
               <a:ext uri="{FF2B5EF4-FFF2-40B4-BE49-F238E27FC236}">
-                <a16:creationId xmlns:a16="http://schemas.microsoft.com/office/drawing/2014/main" id="{2EA74E4B-1E0A-6166-2FA8-3CA21BE2E555}"/>
+                <a16:creationId xmlns:a16="http://schemas.microsoft.com/office/drawing/2014/main" id="{D73265E2-FBFD-0DC8-0838-D5B80A3A7CD9}"/>
               </a:ext>
             </a:extLst>
           </p:cNvPr>
@@ -2224,7 +2224,7 @@
           <a:bodyPr/>
           <a:lstStyle/>
           <a:p>
-            <a:fld id="{851177F4-E301-4E1D-B2F0-E53DBA27D99A}" type="slidenum">
+            <a:fld id="{883F13B9-9467-4046-BF92-7C11D9711524}" type="slidenum">
               <a:rPr kumimoji="1" lang="ja-JP" altLang="en-US" smtClean="0"/>
               <a:t>‹#›</a:t>
             </a:fld>
@@ -2235,7 +2235,7 @@
     </p:spTree>
     <p:extLst>
       <p:ext uri="{BB962C8B-B14F-4D97-AF65-F5344CB8AC3E}">
-        <p14:creationId xmlns:p14="http://schemas.microsoft.com/office/powerpoint/2010/main" val="3299981309"/>
+        <p14:creationId xmlns:p14="http://schemas.microsoft.com/office/powerpoint/2010/main" val="1590271137"/>
       </p:ext>
     </p:extLst>
   </p:cSld>
@@ -2267,7 +2267,7 @@
           <p:cNvPr id="2" name="日付プレースホルダー 1">
             <a:extLst>
               <a:ext uri="{FF2B5EF4-FFF2-40B4-BE49-F238E27FC236}">
-                <a16:creationId xmlns:a16="http://schemas.microsoft.com/office/drawing/2014/main" id="{F3CC5532-ECD2-0EDC-9EB3-0FCD6B89BCFC}"/>
+                <a16:creationId xmlns:a16="http://schemas.microsoft.com/office/drawing/2014/main" id="{4C2A62CE-3057-1839-D05D-570D56518CDF}"/>
               </a:ext>
             </a:extLst>
           </p:cNvPr>
@@ -2283,7 +2283,7 @@
           <a:bodyPr/>
           <a:lstStyle/>
           <a:p>
-            <a:fld id="{54A04B92-4CCB-4150-9796-4E1725954593}" type="datetimeFigureOut">
+            <a:fld id="{B9F574A8-C7B1-4E0F-9AF3-9FC6EC549DE5}" type="datetimeFigureOut">
               <a:rPr kumimoji="1" lang="ja-JP" altLang="en-US" smtClean="0"/>
               <a:t>2026/9/20</a:t>
             </a:fld>
@@ -2296,7 +2296,7 @@
           <p:cNvPr id="3" name="フッター プレースホルダー 2">
             <a:extLst>
               <a:ext uri="{FF2B5EF4-FFF2-40B4-BE49-F238E27FC236}">
-                <a16:creationId xmlns:a16="http://schemas.microsoft.com/office/drawing/2014/main" id="{FDC4B3DA-AB1A-38F2-4217-6E96661EFAC9}"/>
+                <a16:creationId xmlns:a16="http://schemas.microsoft.com/office/drawing/2014/main" id="{76F5BA83-553C-1C75-52B7-D71EEE88945B}"/>
               </a:ext>
             </a:extLst>
           </p:cNvPr>
@@ -2321,7 +2321,7 @@
           <p:cNvPr id="4" name="スライド番号プレースホルダー 3">
             <a:extLst>
               <a:ext uri="{FF2B5EF4-FFF2-40B4-BE49-F238E27FC236}">
-                <a16:creationId xmlns:a16="http://schemas.microsoft.com/office/drawing/2014/main" id="{77EFAF08-82B6-2CF2-63AF-DDF8CD1A9617}"/>
+                <a16:creationId xmlns:a16="http://schemas.microsoft.com/office/drawing/2014/main" id="{ADB0767F-EFD2-9C3C-78E5-AF20976C2CD0}"/>
               </a:ext>
             </a:extLst>
           </p:cNvPr>
@@ -2337,7 +2337,7 @@
           <a:bodyPr/>
           <a:lstStyle/>
           <a:p>
-            <a:fld id="{851177F4-E301-4E1D-B2F0-E53DBA27D99A}" type="slidenum">
+            <a:fld id="{883F13B9-9467-4046-BF92-7C11D9711524}" type="slidenum">
               <a:rPr kumimoji="1" lang="ja-JP" altLang="en-US" smtClean="0"/>
               <a:t>‹#›</a:t>
             </a:fld>
@@ -2348,7 +2348,7 @@
     </p:spTree>
     <p:extLst>
       <p:ext uri="{BB962C8B-B14F-4D97-AF65-F5344CB8AC3E}">
-        <p14:creationId xmlns:p14="http://schemas.microsoft.com/office/powerpoint/2010/main" val="70006652"/>
+        <p14:creationId xmlns:p14="http://schemas.microsoft.com/office/powerpoint/2010/main" val="3057002571"/>
       </p:ext>
     </p:extLst>
   </p:cSld>
@@ -2380,7 +2380,7 @@
           <p:cNvPr id="2" name="タイトル 1">
             <a:extLst>
               <a:ext uri="{FF2B5EF4-FFF2-40B4-BE49-F238E27FC236}">
-                <a16:creationId xmlns:a16="http://schemas.microsoft.com/office/drawing/2014/main" id="{BBB4E6CE-7B7E-27C2-2339-8FBE4B0741B3}"/>
+                <a16:creationId xmlns:a16="http://schemas.microsoft.com/office/drawing/2014/main" id="{9D334A04-C070-2A5A-BDF2-9DCC6ACCB635}"/>
               </a:ext>
             </a:extLst>
           </p:cNvPr>
@@ -2417,7 +2417,7 @@
           <p:cNvPr id="3" name="コンテンツ プレースホルダー 2">
             <a:extLst>
               <a:ext uri="{FF2B5EF4-FFF2-40B4-BE49-F238E27FC236}">
-                <a16:creationId xmlns:a16="http://schemas.microsoft.com/office/drawing/2014/main" id="{E22B9031-8EAA-82A7-16C2-A7916C1DB911}"/>
+                <a16:creationId xmlns:a16="http://schemas.microsoft.com/office/drawing/2014/main" id="{0B8E9FA7-A58D-7447-1753-1EBE3F24E618}"/>
               </a:ext>
             </a:extLst>
           </p:cNvPr>
@@ -2539,7 +2539,7 @@
           <p:cNvPr id="4" name="テキスト プレースホルダー 3">
             <a:extLst>
               <a:ext uri="{FF2B5EF4-FFF2-40B4-BE49-F238E27FC236}">
-                <a16:creationId xmlns:a16="http://schemas.microsoft.com/office/drawing/2014/main" id="{B268E60D-F237-2072-9498-EC304E54E072}"/>
+                <a16:creationId xmlns:a16="http://schemas.microsoft.com/office/drawing/2014/main" id="{536AA990-452B-8508-4227-3C8BD2CFD721}"/>
               </a:ext>
             </a:extLst>
           </p:cNvPr>
@@ -2610,7 +2610,7 @@
           <p:cNvPr id="5" name="日付プレースホルダー 4">
             <a:extLst>
               <a:ext uri="{FF2B5EF4-FFF2-40B4-BE49-F238E27FC236}">
-                <a16:creationId xmlns:a16="http://schemas.microsoft.com/office/drawing/2014/main" id="{722E19D2-9FAC-3115-FE45-5E8A304D578B}"/>
+                <a16:creationId xmlns:a16="http://schemas.microsoft.com/office/drawing/2014/main" id="{D3D291E1-8ECE-4791-3E7B-E5ED3C066BEB}"/>
               </a:ext>
             </a:extLst>
           </p:cNvPr>
@@ -2626,7 +2626,7 @@
           <a:bodyPr/>
           <a:lstStyle/>
           <a:p>
-            <a:fld id="{54A04B92-4CCB-4150-9796-4E1725954593}" type="datetimeFigureOut">
+            <a:fld id="{B9F574A8-C7B1-4E0F-9AF3-9FC6EC549DE5}" type="datetimeFigureOut">
               <a:rPr kumimoji="1" lang="ja-JP" altLang="en-US" smtClean="0"/>
               <a:t>2026/9/20</a:t>
             </a:fld>
@@ -2639,7 +2639,7 @@
           <p:cNvPr id="6" name="フッター プレースホルダー 5">
             <a:extLst>
               <a:ext uri="{FF2B5EF4-FFF2-40B4-BE49-F238E27FC236}">
-                <a16:creationId xmlns:a16="http://schemas.microsoft.com/office/drawing/2014/main" id="{7D5231E8-565C-710D-3FBB-61F0D6E7D2D2}"/>
+                <a16:creationId xmlns:a16="http://schemas.microsoft.com/office/drawing/2014/main" id="{EDCD74A3-BA16-EE64-9B9A-9F784B29BF78}"/>
               </a:ext>
             </a:extLst>
           </p:cNvPr>
@@ -2664,7 +2664,7 @@
           <p:cNvPr id="7" name="スライド番号プレースホルダー 6">
             <a:extLst>
               <a:ext uri="{FF2B5EF4-FFF2-40B4-BE49-F238E27FC236}">
-                <a16:creationId xmlns:a16="http://schemas.microsoft.com/office/drawing/2014/main" id="{DD37D59B-4F19-1DAC-C634-D0F4F34E765A}"/>
+                <a16:creationId xmlns:a16="http://schemas.microsoft.com/office/drawing/2014/main" id="{ACE22041-B882-C9EE-6601-6A54680C0AB2}"/>
               </a:ext>
             </a:extLst>
           </p:cNvPr>
@@ -2680,7 +2680,7 @@
           <a:bodyPr/>
           <a:lstStyle/>
           <a:p>
-            <a:fld id="{851177F4-E301-4E1D-B2F0-E53DBA27D99A}" type="slidenum">
+            <a:fld id="{883F13B9-9467-4046-BF92-7C11D9711524}" type="slidenum">
               <a:rPr kumimoji="1" lang="ja-JP" altLang="en-US" smtClean="0"/>
               <a:t>‹#›</a:t>
             </a:fld>
@@ -2691,7 +2691,7 @@
     </p:spTree>
     <p:extLst>
       <p:ext uri="{BB962C8B-B14F-4D97-AF65-F5344CB8AC3E}">
-        <p14:creationId xmlns:p14="http://schemas.microsoft.com/office/powerpoint/2010/main" val="3390760452"/>
+        <p14:creationId xmlns:p14="http://schemas.microsoft.com/office/powerpoint/2010/main" val="1798859613"/>
       </p:ext>
     </p:extLst>
   </p:cSld>
@@ -2723,7 +2723,7 @@
           <p:cNvPr id="2" name="タイトル 1">
             <a:extLst>
               <a:ext uri="{FF2B5EF4-FFF2-40B4-BE49-F238E27FC236}">
-                <a16:creationId xmlns:a16="http://schemas.microsoft.com/office/drawing/2014/main" id="{2DFF44C3-0B5E-F173-84D3-F5A5F90E13D7}"/>
+                <a16:creationId xmlns:a16="http://schemas.microsoft.com/office/drawing/2014/main" id="{F89AD2FD-4BBF-BACF-9675-0CFAA5F3D972}"/>
               </a:ext>
             </a:extLst>
           </p:cNvPr>
@@ -2760,7 +2760,7 @@
           <p:cNvPr id="3" name="図プレースホルダー 2">
             <a:extLst>
               <a:ext uri="{FF2B5EF4-FFF2-40B4-BE49-F238E27FC236}">
-                <a16:creationId xmlns:a16="http://schemas.microsoft.com/office/drawing/2014/main" id="{6214AD81-6011-CECA-1A84-CC8F1CC4EC75}"/>
+                <a16:creationId xmlns:a16="http://schemas.microsoft.com/office/drawing/2014/main" id="{8FF32C96-BA2E-9095-69C2-F0024874C13B}"/>
               </a:ext>
             </a:extLst>
           </p:cNvPr>
@@ -2827,7 +2827,7 @@
           <p:cNvPr id="4" name="テキスト プレースホルダー 3">
             <a:extLst>
               <a:ext uri="{FF2B5EF4-FFF2-40B4-BE49-F238E27FC236}">
-                <a16:creationId xmlns:a16="http://schemas.microsoft.com/office/drawing/2014/main" id="{E884FDEE-F0E3-477B-BAB4-D7059BE7A1F5}"/>
+                <a16:creationId xmlns:a16="http://schemas.microsoft.com/office/drawing/2014/main" id="{44EA9693-B783-7633-0750-A063F8F128C0}"/>
               </a:ext>
             </a:extLst>
           </p:cNvPr>
@@ -2898,7 +2898,7 @@
           <p:cNvPr id="5" name="日付プレースホルダー 4">
             <a:extLst>
               <a:ext uri="{FF2B5EF4-FFF2-40B4-BE49-F238E27FC236}">
-                <a16:creationId xmlns:a16="http://schemas.microsoft.com/office/drawing/2014/main" id="{6E438200-2814-A3E8-60E3-2F2BC0B3EB09}"/>
+                <a16:creationId xmlns:a16="http://schemas.microsoft.com/office/drawing/2014/main" id="{DDDDCCC8-76A0-9A88-E4C4-51974E39305E}"/>
               </a:ext>
             </a:extLst>
           </p:cNvPr>
@@ -2914,7 +2914,7 @@
           <a:bodyPr/>
           <a:lstStyle/>
           <a:p>
-            <a:fld id="{54A04B92-4CCB-4150-9796-4E1725954593}" type="datetimeFigureOut">
+            <a:fld id="{B9F574A8-C7B1-4E0F-9AF3-9FC6EC549DE5}" type="datetimeFigureOut">
               <a:rPr kumimoji="1" lang="ja-JP" altLang="en-US" smtClean="0"/>
               <a:t>2026/9/20</a:t>
             </a:fld>
@@ -2927,7 +2927,7 @@
           <p:cNvPr id="6" name="フッター プレースホルダー 5">
             <a:extLst>
               <a:ext uri="{FF2B5EF4-FFF2-40B4-BE49-F238E27FC236}">
-                <a16:creationId xmlns:a16="http://schemas.microsoft.com/office/drawing/2014/main" id="{A4888BEC-985C-7334-FF89-A664546767EE}"/>
+                <a16:creationId xmlns:a16="http://schemas.microsoft.com/office/drawing/2014/main" id="{36D75E00-2CCE-3180-675E-085EF90AF64D}"/>
               </a:ext>
             </a:extLst>
           </p:cNvPr>
@@ -2952,7 +2952,7 @@
           <p:cNvPr id="7" name="スライド番号プレースホルダー 6">
             <a:extLst>
               <a:ext uri="{FF2B5EF4-FFF2-40B4-BE49-F238E27FC236}">
-                <a16:creationId xmlns:a16="http://schemas.microsoft.com/office/drawing/2014/main" id="{4F0FEDDE-79CF-9B39-8A7B-30FAE78293B1}"/>
+                <a16:creationId xmlns:a16="http://schemas.microsoft.com/office/drawing/2014/main" id="{97404FD9-6FCD-B7F0-9621-1E05429370C2}"/>
               </a:ext>
             </a:extLst>
           </p:cNvPr>
@@ -2968,7 +2968,7 @@
           <a:bodyPr/>
           <a:lstStyle/>
           <a:p>
-            <a:fld id="{851177F4-E301-4E1D-B2F0-E53DBA27D99A}" type="slidenum">
+            <a:fld id="{883F13B9-9467-4046-BF92-7C11D9711524}" type="slidenum">
               <a:rPr kumimoji="1" lang="ja-JP" altLang="en-US" smtClean="0"/>
               <a:t>‹#›</a:t>
             </a:fld>
@@ -2979,7 +2979,7 @@
     </p:spTree>
     <p:extLst>
       <p:ext uri="{BB962C8B-B14F-4D97-AF65-F5344CB8AC3E}">
-        <p14:creationId xmlns:p14="http://schemas.microsoft.com/office/powerpoint/2010/main" val="495711730"/>
+        <p14:creationId xmlns:p14="http://schemas.microsoft.com/office/powerpoint/2010/main" val="3805341035"/>
       </p:ext>
     </p:extLst>
   </p:cSld>
@@ -3016,7 +3016,7 @@
           <p:cNvPr id="2" name="タイトル プレースホルダー 1">
             <a:extLst>
               <a:ext uri="{FF2B5EF4-FFF2-40B4-BE49-F238E27FC236}">
-                <a16:creationId xmlns:a16="http://schemas.microsoft.com/office/drawing/2014/main" id="{911109B5-481F-AE04-F3E9-39654A8925D7}"/>
+                <a16:creationId xmlns:a16="http://schemas.microsoft.com/office/drawing/2014/main" id="{0C19A223-AB64-C82C-89D0-2EAED9632312}"/>
               </a:ext>
             </a:extLst>
           </p:cNvPr>
@@ -3054,7 +3054,7 @@
           <p:cNvPr id="3" name="テキスト プレースホルダー 2">
             <a:extLst>
               <a:ext uri="{FF2B5EF4-FFF2-40B4-BE49-F238E27FC236}">
-                <a16:creationId xmlns:a16="http://schemas.microsoft.com/office/drawing/2014/main" id="{8EA60A56-24D3-5E9D-EE6F-68B548CC0BAA}"/>
+                <a16:creationId xmlns:a16="http://schemas.microsoft.com/office/drawing/2014/main" id="{404884DE-4F0C-DEA7-F409-5D82603C7E1E}"/>
               </a:ext>
             </a:extLst>
           </p:cNvPr>
@@ -3153,7 +3153,7 @@
           <p:cNvPr id="4" name="日付プレースホルダー 3">
             <a:extLst>
               <a:ext uri="{FF2B5EF4-FFF2-40B4-BE49-F238E27FC236}">
-                <a16:creationId xmlns:a16="http://schemas.microsoft.com/office/drawing/2014/main" id="{B9B14543-FB7E-5161-C87B-AD54BF50EC19}"/>
+                <a16:creationId xmlns:a16="http://schemas.microsoft.com/office/drawing/2014/main" id="{4EACFE34-3510-916D-FA33-32837FCF9805}"/>
               </a:ext>
             </a:extLst>
           </p:cNvPr>
@@ -3187,7 +3187,7 @@
             </a:lvl1pPr>
           </a:lstStyle>
           <a:p>
-            <a:fld id="{54A04B92-4CCB-4150-9796-4E1725954593}" type="datetimeFigureOut">
+            <a:fld id="{B9F574A8-C7B1-4E0F-9AF3-9FC6EC549DE5}" type="datetimeFigureOut">
               <a:rPr kumimoji="1" lang="ja-JP" altLang="en-US" smtClean="0"/>
               <a:t>2026/9/20</a:t>
             </a:fld>
@@ -3200,7 +3200,7 @@
           <p:cNvPr id="5" name="フッター プレースホルダー 4">
             <a:extLst>
               <a:ext uri="{FF2B5EF4-FFF2-40B4-BE49-F238E27FC236}">
-                <a16:creationId xmlns:a16="http://schemas.microsoft.com/office/drawing/2014/main" id="{E3E61175-E07C-0FE0-122B-59F5BD7386A2}"/>
+                <a16:creationId xmlns:a16="http://schemas.microsoft.com/office/drawing/2014/main" id="{915C5EE9-622B-7497-44A7-6297EAC7B029}"/>
               </a:ext>
             </a:extLst>
           </p:cNvPr>
@@ -3243,7 +3243,7 @@
           <p:cNvPr id="6" name="スライド番号プレースホルダー 5">
             <a:extLst>
               <a:ext uri="{FF2B5EF4-FFF2-40B4-BE49-F238E27FC236}">
-                <a16:creationId xmlns:a16="http://schemas.microsoft.com/office/drawing/2014/main" id="{288DD53E-DE0B-BE6D-8B70-3E781F70BB8E}"/>
+                <a16:creationId xmlns:a16="http://schemas.microsoft.com/office/drawing/2014/main" id="{DFABB1E9-E62C-D620-7A71-1CF534F60CD3}"/>
               </a:ext>
             </a:extLst>
           </p:cNvPr>
@@ -3277,7 +3277,7 @@
             </a:lvl1pPr>
           </a:lstStyle>
           <a:p>
-            <a:fld id="{851177F4-E301-4E1D-B2F0-E53DBA27D99A}" type="slidenum">
+            <a:fld id="{883F13B9-9467-4046-BF92-7C11D9711524}" type="slidenum">
               <a:rPr kumimoji="1" lang="ja-JP" altLang="en-US" smtClean="0"/>
               <a:t>‹#›</a:t>
             </a:fld>
@@ -3288,7 +3288,7 @@
     </p:spTree>
     <p:extLst>
       <p:ext uri="{BB962C8B-B14F-4D97-AF65-F5344CB8AC3E}">
-        <p14:creationId xmlns:p14="http://schemas.microsoft.com/office/powerpoint/2010/main" val="1475680500"/>
+        <p14:creationId xmlns:p14="http://schemas.microsoft.com/office/powerpoint/2010/main" val="1318273199"/>
       </p:ext>
     </p:extLst>
   </p:cSld>
